--- a/signals_pitch.pptx
+++ b/signals_pitch.pptx
@@ -123,6 +123,97 @@
     </p:ext>
   </p:extLst>
 </p:presentation>
+</file>
+
+<file path=ppt/changesInfos/changesInfo1.xml><?xml version="1.0" encoding="utf-8"?>
+<pc:chgInfo xmlns:a="http://schemas.openxmlformats.org/drawingml/2006/main" xmlns:r="http://schemas.openxmlformats.org/officeDocument/2006/relationships" xmlns:ac="http://schemas.microsoft.com/office/drawing/2013/main/command" xmlns:pc="http://schemas.microsoft.com/office/powerpoint/2013/main/command">
+  <pc:docChgLst>
+    <pc:chgData name="Iulia APD" userId="ca17bbdb33c55ad4" providerId="LiveId" clId="{F31124DB-8D39-45C9-AAED-852F2F2C05A7}"/>
+    <pc:docChg chg="undo custSel modSld">
+      <pc:chgData name="Iulia APD" userId="ca17bbdb33c55ad4" providerId="LiveId" clId="{F31124DB-8D39-45C9-AAED-852F2F2C05A7}" dt="2026-10-05T08:46:17.941" v="22" actId="20577"/>
+      <pc:docMkLst>
+        <pc:docMk/>
+      </pc:docMkLst>
+      <pc:sldChg chg="modSp mod">
+        <pc:chgData name="Iulia APD" userId="ca17bbdb33c55ad4" providerId="LiveId" clId="{F31124DB-8D39-45C9-AAED-852F2F2C05A7}" dt="2026-10-05T08:46:17.941" v="22" actId="20577"/>
+        <pc:sldMkLst>
+          <pc:docMk/>
+          <pc:sldMk cId="0" sldId="263"/>
+        </pc:sldMkLst>
+        <pc:spChg chg="mod">
+          <ac:chgData name="Iulia APD" userId="ca17bbdb33c55ad4" providerId="LiveId" clId="{F31124DB-8D39-45C9-AAED-852F2F2C05A7}" dt="2026-10-05T08:46:17.941" v="22" actId="20577"/>
+          <ac:spMkLst>
+            <pc:docMk/>
+            <pc:sldMk cId="0" sldId="263"/>
+            <ac:spMk id="13" creationId="{E48DAEE5-9E7C-136C-1ED3-2F84C6376D88}"/>
+          </ac:spMkLst>
+        </pc:spChg>
+      </pc:sldChg>
+      <pc:sldChg chg="modSp mod">
+        <pc:chgData name="Iulia APD" userId="ca17bbdb33c55ad4" providerId="LiveId" clId="{F31124DB-8D39-45C9-AAED-852F2F2C05A7}" dt="2026-10-05T08:46:13.334" v="20" actId="368"/>
+        <pc:sldMkLst>
+          <pc:docMk/>
+          <pc:sldMk cId="0" sldId="265"/>
+        </pc:sldMkLst>
+        <pc:spChg chg="mod">
+          <ac:chgData name="Iulia APD" userId="ca17bbdb33c55ad4" providerId="LiveId" clId="{F31124DB-8D39-45C9-AAED-852F2F2C05A7}" dt="2026-10-05T08:46:13.334" v="20" actId="368"/>
+          <ac:spMkLst>
+            <pc:docMk/>
+            <pc:sldMk cId="0" sldId="265"/>
+            <ac:spMk id="6" creationId="{00000000-0000-0000-0000-000000000000}"/>
+          </ac:spMkLst>
+        </pc:spChg>
+      </pc:sldChg>
+      <pc:sldChg chg="delSp modSp mod">
+        <pc:chgData name="Iulia APD" userId="ca17bbdb33c55ad4" providerId="LiveId" clId="{F31124DB-8D39-45C9-AAED-852F2F2C05A7}" dt="2026-10-05T08:44:58.345" v="9" actId="20577"/>
+        <pc:sldMkLst>
+          <pc:docMk/>
+          <pc:sldMk cId="0" sldId="271"/>
+        </pc:sldMkLst>
+        <pc:spChg chg="mod">
+          <ac:chgData name="Iulia APD" userId="ca17bbdb33c55ad4" providerId="LiveId" clId="{F31124DB-8D39-45C9-AAED-852F2F2C05A7}" dt="2026-10-05T08:44:48.238" v="0" actId="20577"/>
+          <ac:spMkLst>
+            <pc:docMk/>
+            <pc:sldMk cId="0" sldId="271"/>
+            <ac:spMk id="14" creationId="{00000000-0000-0000-0000-000000000000}"/>
+          </ac:spMkLst>
+        </pc:spChg>
+        <pc:spChg chg="mod">
+          <ac:chgData name="Iulia APD" userId="ca17bbdb33c55ad4" providerId="LiveId" clId="{F31124DB-8D39-45C9-AAED-852F2F2C05A7}" dt="2026-10-05T08:44:56.599" v="8" actId="1076"/>
+          <ac:spMkLst>
+            <pc:docMk/>
+            <pc:sldMk cId="0" sldId="271"/>
+            <ac:spMk id="15" creationId="{00000000-0000-0000-0000-000000000000}"/>
+          </ac:spMkLst>
+        </pc:spChg>
+        <pc:spChg chg="mod">
+          <ac:chgData name="Iulia APD" userId="ca17bbdb33c55ad4" providerId="LiveId" clId="{F31124DB-8D39-45C9-AAED-852F2F2C05A7}" dt="2026-10-05T08:44:58.345" v="9" actId="20577"/>
+          <ac:spMkLst>
+            <pc:docMk/>
+            <pc:sldMk cId="0" sldId="271"/>
+            <ac:spMk id="25" creationId="{00000000-0000-0000-0000-000000000000}"/>
+          </ac:spMkLst>
+        </pc:spChg>
+        <pc:picChg chg="del">
+          <ac:chgData name="Iulia APD" userId="ca17bbdb33c55ad4" providerId="LiveId" clId="{F31124DB-8D39-45C9-AAED-852F2F2C05A7}" dt="2026-10-05T08:44:49.469" v="1" actId="478"/>
+          <ac:picMkLst>
+            <pc:docMk/>
+            <pc:sldMk cId="0" sldId="271"/>
+            <ac:picMk id="13" creationId="{00000000-0000-0000-0000-000000000000}"/>
+          </ac:picMkLst>
+        </pc:picChg>
+        <pc:picChg chg="del">
+          <ac:chgData name="Iulia APD" userId="ca17bbdb33c55ad4" providerId="LiveId" clId="{F31124DB-8D39-45C9-AAED-852F2F2C05A7}" dt="2026-10-05T08:44:51.362" v="3" actId="478"/>
+          <ac:picMkLst>
+            <pc:docMk/>
+            <pc:sldMk cId="0" sldId="271"/>
+            <ac:picMk id="24" creationId="{00000000-0000-0000-0000-000000000000}"/>
+          </ac:picMkLst>
+        </pc:picChg>
+      </pc:sldChg>
+    </pc:docChg>
+  </pc:docChgLst>
+</pc:chgInfo>
 </file>
 
 <file path=ppt/notesMasters/notesMaster1.xml><?xml version="1.0" encoding="utf-8"?>
@@ -3974,7 +4065,7 @@
           <a:bodyPr/>
           <a:lstStyle/>
           <a:p>
-            <a:endParaRPr lang="en-US"/>
+            <a:endParaRPr lang="en-US" dirty="0"/>
           </a:p>
         </p:txBody>
       </p:sp>
@@ -4278,29 +4369,6 @@
           </a:p>
         </p:txBody>
       </p:sp>
-      <p:pic>
-        <p:nvPicPr>
-          <p:cNvPr id="13" name="Image 3" descr="CheckCircle"/>
-          <p:cNvPicPr>
-            <a:picLocks noChangeAspect="1"/>
-          </p:cNvPicPr>
-          <p:nvPr/>
-        </p:nvPicPr>
-        <p:blipFill>
-          <a:blip r:embed="rId3"/>
-          <a:srcRect/>
-          <a:stretch/>
-        </p:blipFill>
-        <p:spPr>
-          <a:xfrm>
-            <a:off x="1117600" y="4180842"/>
-            <a:ext cx="279400" cy="279400"/>
-          </a:xfrm>
-          <a:prstGeom prst="rect">
-            <a:avLst/>
-          </a:prstGeom>
-        </p:spPr>
-      </p:pic>
       <p:sp>
         <p:nvSpPr>
           <p:cNvPr id="14" name="Text 8"/>
@@ -4330,17 +4398,6 @@
               </a:lnSpc>
               <a:buNone/>
             </a:pPr>
-            <a:r>
-              <a:rPr lang="en-US" sz="1500" dirty="0">
-                <a:solidFill>
-                  <a:srgbClr val="D3D8F0"/>
-                </a:solidFill>
-                <a:latin typeface="Nunito Sans" pitchFamily="34" charset="0"/>
-                <a:ea typeface="Nunito Sans" pitchFamily="34" charset="-122"/>
-                <a:cs typeface="Nunito Sans" pitchFamily="34" charset="-120"/>
-              </a:rPr>
-              <a:t>[altă funcție finalizată]</a:t>
-            </a:r>
             <a:endParaRPr lang="en-US" sz="1500" dirty="0"/>
           </a:p>
         </p:txBody>
@@ -4674,29 +4731,6 @@
           </a:p>
         </p:txBody>
       </p:sp>
-      <p:pic>
-        <p:nvPicPr>
-          <p:cNvPr id="24" name="Image 7" descr="Clock"/>
-          <p:cNvPicPr>
-            <a:picLocks noChangeAspect="1"/>
-          </p:cNvPicPr>
-          <p:nvPr/>
-        </p:nvPicPr>
-        <p:blipFill>
-          <a:blip r:embed="rId4"/>
-          <a:srcRect/>
-          <a:stretch/>
-        </p:blipFill>
-        <p:spPr>
-          <a:xfrm>
-            <a:off x="6527800" y="4180842"/>
-            <a:ext cx="279400" cy="279400"/>
-          </a:xfrm>
-          <a:prstGeom prst="rect">
-            <a:avLst/>
-          </a:prstGeom>
-        </p:spPr>
-      </p:pic>
       <p:sp>
         <p:nvSpPr>
           <p:cNvPr id="25" name="Text 15"/>
@@ -4726,17 +4760,6 @@
               </a:lnSpc>
               <a:buNone/>
             </a:pPr>
-            <a:r>
-              <a:rPr lang="en-US" sz="1500" dirty="0">
-                <a:solidFill>
-                  <a:srgbClr val="4A5170"/>
-                </a:solidFill>
-                <a:latin typeface="Nunito Sans" pitchFamily="34" charset="0"/>
-                <a:ea typeface="Nunito Sans" pitchFamily="34" charset="-122"/>
-                <a:cs typeface="Nunito Sans" pitchFamily="34" charset="-120"/>
-              </a:rPr>
-              <a:t>[altă funcție planificată]</a:t>
-            </a:r>
             <a:endParaRPr lang="en-US" sz="1500" dirty="0"/>
           </a:p>
         </p:txBody>
@@ -11448,7 +11471,51 @@
                 <a:ea typeface="Nunito Sans" pitchFamily="34" charset="-122"/>
                 <a:cs typeface="Nunito Sans" pitchFamily="34" charset="-120"/>
               </a:rPr>
-              <a:t> – €1.490/an: elevi nelimitați</a:t>
+              <a:t> </a:t>
+            </a:r>
+            <a:r>
+              <a:rPr lang="en-US" sz="1300">
+                <a:solidFill>
+                  <a:srgbClr val="1C255E"/>
+                </a:solidFill>
+                <a:latin typeface="Nunito Sans" pitchFamily="34" charset="0"/>
+                <a:ea typeface="Nunito Sans" pitchFamily="34" charset="-122"/>
+                <a:cs typeface="Nunito Sans" pitchFamily="34" charset="-120"/>
+              </a:rPr>
+              <a:t>– €</a:t>
+            </a:r>
+            <a:r>
+              <a:rPr lang="en-US" sz="1300" dirty="0">
+                <a:solidFill>
+                  <a:srgbClr val="1C255E"/>
+                </a:solidFill>
+                <a:latin typeface="Nunito Sans" pitchFamily="34" charset="0"/>
+                <a:ea typeface="Nunito Sans" pitchFamily="34" charset="-122"/>
+                <a:cs typeface="Nunito Sans" pitchFamily="34" charset="-120"/>
+              </a:rPr>
+              <a:t>2</a:t>
+            </a:r>
+            <a:r>
+              <a:rPr lang="en-US" sz="1300">
+                <a:solidFill>
+                  <a:srgbClr val="1C255E"/>
+                </a:solidFill>
+                <a:latin typeface="Nunito Sans" pitchFamily="34" charset="0"/>
+                <a:ea typeface="Nunito Sans" pitchFamily="34" charset="-122"/>
+                <a:cs typeface="Nunito Sans" pitchFamily="34" charset="-120"/>
+              </a:rPr>
+              <a:t>.490</a:t>
+            </a:r>
+            <a:r>
+              <a:rPr lang="en-US" sz="1300" dirty="0">
+                <a:solidFill>
+                  <a:srgbClr val="1C255E"/>
+                </a:solidFill>
+                <a:latin typeface="Nunito Sans" pitchFamily="34" charset="0"/>
+                <a:ea typeface="Nunito Sans" pitchFamily="34" charset="-122"/>
+                <a:cs typeface="Nunito Sans" pitchFamily="34" charset="-120"/>
+              </a:rPr>
+              <a:t>/an: elevi nelimitați</a:t>
             </a:r>
             <a:endParaRPr lang="en-US" sz="1300" dirty="0"/>
           </a:p>
@@ -13709,30 +13776,30 @@
               <a:t> Maria”-</a:t>
             </a:r>
             <a:r>
-              <a:rPr lang="en-US" dirty="0"/>
+              <a:rPr lang="en-US" b="1" dirty="0"/>
               <a:t>1258 </a:t>
             </a:r>
             <a:r>
-              <a:rPr lang="en-US" dirty="0" err="1"/>
+              <a:rPr lang="en-US" b="1" dirty="0" err="1"/>
               <a:t>elevi</a:t>
             </a:r>
             <a:r>
-              <a:rPr lang="en-US" dirty="0"/>
+              <a:rPr lang="en-US" b="1" dirty="0"/>
               <a:t> cu </a:t>
             </a:r>
             <a:r>
-              <a:rPr lang="en-US" dirty="0" err="1"/>
+              <a:rPr lang="en-US" b="1" dirty="0" err="1"/>
               <a:t>deficienta</a:t>
             </a:r>
             <a:r>
-              <a:rPr lang="en-US" dirty="0"/>
+              <a:rPr lang="en-US" b="1" dirty="0"/>
               <a:t> de </a:t>
             </a:r>
             <a:r>
-              <a:rPr lang="en-US" dirty="0" err="1"/>
+              <a:rPr lang="en-US" b="1" dirty="0" err="1"/>
               <a:t>auz</a:t>
             </a:r>
-            <a:endParaRPr lang="en-US" sz="1400" dirty="0"/>
+            <a:endParaRPr lang="en-US" sz="1400" b="1" dirty="0"/>
           </a:p>
         </p:txBody>
       </p:sp>
